--- a/dashboard/public/downloads/dev-transformation-summary-low.pptx
+++ b/dashboard/public/downloads/dev-transformation-summary-low.pptx
@@ -924,7 +924,7 @@
             </a:avLst>
           </a:prstGeom>
           <a:solidFill>
-            <a:srgbClr val="E8F6F0"/>
+            <a:srgbClr val="EFF3F5"/>
           </a:solidFill>
           <a:ln/>
         </p:spPr>
@@ -938,7 +938,7 @@
             <a:r>
               <a:rPr lang="en-US" sz="1400" b="1" dirty="0">
                 <a:solidFill>
-                  <a:srgbClr val="02A878"/>
+                  <a:srgbClr val="5A7184"/>
                 </a:solidFill>
                 <a:latin typeface="Malgun Gothic" pitchFamily="34" charset="0"/>
                 <a:ea typeface="Malgun Gothic" pitchFamily="34" charset="-122"/>
@@ -1036,16 +1036,16 @@
         </p:nvSpPr>
         <p:spPr>
           <a:xfrm>
-            <a:off x="914400" y="987552"/>
-            <a:ext cx="10360152" cy="932688"/>
+            <a:off x="914400" y="932688"/>
+            <a:ext cx="10360152" cy="822960"/>
           </a:xfrm>
           <a:prstGeom prst="roundRect">
             <a:avLst>
-              <a:gd name="adj" fmla="val 9804"/>
+              <a:gd name="adj" fmla="val 11111"/>
             </a:avLst>
           </a:prstGeom>
           <a:solidFill>
-            <a:srgbClr val="E8F6F0"/>
+            <a:srgbClr val="F5F7F8"/>
           </a:solidFill>
           <a:ln/>
         </p:spPr>
@@ -1058,8 +1058,8 @@
         </p:nvSpPr>
         <p:spPr>
           <a:xfrm>
-            <a:off x="1097280" y="1078992"/>
-            <a:ext cx="9994392" cy="475488"/>
+            <a:off x="1097280" y="1005840"/>
+            <a:ext cx="9994392" cy="420624"/>
           </a:xfrm>
           <a:prstGeom prst="rect">
             <a:avLst/>
@@ -1075,7 +1075,7 @@
               <a:buNone/>
             </a:pPr>
             <a:r>
-              <a:rPr lang="en-US" sz="2400" b="1" i="1" dirty="0">
+              <a:rPr lang="en-US" sz="2200" b="1" i="1" dirty="0">
                 <a:solidFill>
                   <a:srgbClr val="17313B"/>
                 </a:solidFill>
@@ -1085,7 +1085,7 @@
               </a:rPr>
               <a:t>“고객의 아키텍처 안으로 들어가 수요를 함께 설계하는 기업이 이긴다”</a:t>
             </a:r>
-            <a:endParaRPr lang="en-US" sz="2400" dirty="0"/>
+            <a:endParaRPr lang="en-US" sz="2200" dirty="0"/>
           </a:p>
         </p:txBody>
       </p:sp>
@@ -1097,8 +1097,8 @@
         </p:nvSpPr>
         <p:spPr>
           <a:xfrm>
-            <a:off x="1097280" y="1554480"/>
-            <a:ext cx="9994392" cy="256032"/>
+            <a:off x="1097280" y="1426464"/>
+            <a:ext cx="9994392" cy="237744"/>
           </a:xfrm>
           <a:prstGeom prst="rect">
             <a:avLst/>
@@ -1114,7 +1114,7 @@
               <a:buNone/>
             </a:pPr>
             <a:r>
-              <a:rPr lang="en-US" sz="1300" dirty="0">
+              <a:rPr lang="en-US" sz="1250" dirty="0">
                 <a:solidFill>
                   <a:srgbClr val="5A7184"/>
                 </a:solidFill>
@@ -1124,7 +1124,7 @@
               </a:rPr>
               <a:t>— 신문섭 파트너, AI 인프라 슈퍼사이클 인터뷰 (2026-06)</a:t>
             </a:r>
-            <a:endParaRPr lang="en-US" sz="1300" dirty="0"/>
+            <a:endParaRPr lang="en-US" sz="1250" dirty="0"/>
           </a:p>
         </p:txBody>
       </p:sp>
@@ -1136,20 +1136,20 @@
         </p:nvSpPr>
         <p:spPr>
           <a:xfrm>
-            <a:off x="2011680" y="2286000"/>
-            <a:ext cx="3200400" cy="1773936"/>
+            <a:off x="2011680" y="1920240"/>
+            <a:ext cx="3200400" cy="1554480"/>
           </a:xfrm>
           <a:prstGeom prst="roundRect">
             <a:avLst>
-              <a:gd name="adj" fmla="val 5155"/>
+              <a:gd name="adj" fmla="val 5882"/>
             </a:avLst>
           </a:prstGeom>
           <a:solidFill>
-            <a:srgbClr val="F3F6F8"/>
+            <a:srgbClr val="F5F7F8"/>
           </a:solidFill>
           <a:ln w="15875">
             <a:solidFill>
-              <a:srgbClr val="D9E6EC"/>
+              <a:srgbClr val="DCE4E9"/>
             </a:solidFill>
             <a:prstDash val="solid"/>
           </a:ln>
@@ -1163,8 +1163,8 @@
         </p:nvSpPr>
         <p:spPr>
           <a:xfrm>
-            <a:off x="3364992" y="2487168"/>
-            <a:ext cx="493776" cy="493776"/>
+            <a:off x="3383280" y="2066544"/>
+            <a:ext cx="457200" cy="457200"/>
           </a:xfrm>
           <a:prstGeom prst="ellipse">
             <a:avLst/>
@@ -1191,8 +1191,8 @@
         </p:blipFill>
         <p:spPr>
           <a:xfrm>
-            <a:off x="3483498" y="2605674"/>
-            <a:ext cx="256764" cy="256764"/>
+            <a:off x="3493008" y="2176272"/>
+            <a:ext cx="237744" cy="237744"/>
           </a:xfrm>
           <a:prstGeom prst="rect">
             <a:avLst/>
@@ -1207,8 +1207,8 @@
         </p:nvSpPr>
         <p:spPr>
           <a:xfrm>
-            <a:off x="2103120" y="3054096"/>
-            <a:ext cx="3017520" cy="365760"/>
+            <a:off x="2103120" y="2560320"/>
+            <a:ext cx="3017520" cy="347472"/>
           </a:xfrm>
           <a:prstGeom prst="rect">
             <a:avLst/>
@@ -1224,7 +1224,7 @@
               <a:buNone/>
             </a:pPr>
             <a:r>
-              <a:rPr lang="en-US" sz="2200" b="1" dirty="0">
+              <a:rPr lang="en-US" sz="2100" b="1" dirty="0">
                 <a:solidFill>
                   <a:srgbClr val="5A7184"/>
                 </a:solidFill>
@@ -1234,7 +1234,7 @@
               </a:rPr>
               <a:t>수주 이행자</a:t>
             </a:r>
-            <a:endParaRPr lang="en-US" sz="2200" dirty="0"/>
+            <a:endParaRPr lang="en-US" sz="2100" dirty="0"/>
           </a:p>
         </p:txBody>
       </p:sp>
@@ -1246,8 +1246,8 @@
         </p:nvSpPr>
         <p:spPr>
           <a:xfrm>
-            <a:off x="2103120" y="3474720"/>
-            <a:ext cx="3017520" cy="274320"/>
+            <a:off x="2103120" y="2962656"/>
+            <a:ext cx="3017520" cy="256032"/>
           </a:xfrm>
           <a:prstGeom prst="rect">
             <a:avLst/>
@@ -1263,7 +1263,7 @@
               <a:buNone/>
             </a:pPr>
             <a:r>
-              <a:rPr lang="en-US" sz="1300" dirty="0">
+              <a:rPr lang="en-US" sz="1250" dirty="0">
                 <a:solidFill>
                   <a:srgbClr val="5A7184"/>
                 </a:solidFill>
@@ -1273,7 +1273,7 @@
               </a:rPr>
               <a:t>스펙 수령 · RFQ 응답 · QCD</a:t>
             </a:r>
-            <a:endParaRPr lang="en-US" sz="1300" dirty="0"/>
+            <a:endParaRPr lang="en-US" sz="1250" dirty="0"/>
           </a:p>
         </p:txBody>
       </p:sp>
@@ -1285,7 +1285,7 @@
         </p:nvSpPr>
         <p:spPr>
           <a:xfrm>
-            <a:off x="5349240" y="2761488"/>
+            <a:off x="5349240" y="2286000"/>
             <a:ext cx="1463040" cy="822960"/>
           </a:xfrm>
           <a:prstGeom prst="rightArrow">
@@ -1326,12 +1326,12 @@
         </p:nvSpPr>
         <p:spPr>
           <a:xfrm>
-            <a:off x="6949440" y="2286000"/>
-            <a:ext cx="3200400" cy="1773936"/>
+            <a:off x="6949440" y="1920240"/>
+            <a:ext cx="3200400" cy="1554480"/>
           </a:xfrm>
           <a:prstGeom prst="roundRect">
             <a:avLst>
-              <a:gd name="adj" fmla="val 5155"/>
+              <a:gd name="adj" fmla="val 5882"/>
             </a:avLst>
           </a:prstGeom>
           <a:solidFill>
@@ -1353,8 +1353,8 @@
         </p:nvSpPr>
         <p:spPr>
           <a:xfrm>
-            <a:off x="8302752" y="2487168"/>
-            <a:ext cx="493776" cy="493776"/>
+            <a:off x="8321040" y="2066544"/>
+            <a:ext cx="457200" cy="457200"/>
           </a:xfrm>
           <a:prstGeom prst="ellipse">
             <a:avLst/>
@@ -1381,8 +1381,8 @@
         </p:blipFill>
         <p:spPr>
           <a:xfrm>
-            <a:off x="8421258" y="2605674"/>
-            <a:ext cx="256764" cy="256764"/>
+            <a:off x="8430768" y="2176272"/>
+            <a:ext cx="237744" cy="237744"/>
           </a:xfrm>
           <a:prstGeom prst="rect">
             <a:avLst/>
@@ -1397,8 +1397,8 @@
         </p:nvSpPr>
         <p:spPr>
           <a:xfrm>
-            <a:off x="7040880" y="3054096"/>
-            <a:ext cx="3017520" cy="365760"/>
+            <a:off x="7040880" y="2560320"/>
+            <a:ext cx="3017520" cy="347472"/>
           </a:xfrm>
           <a:prstGeom prst="rect">
             <a:avLst/>
@@ -1414,7 +1414,7 @@
               <a:buNone/>
             </a:pPr>
             <a:r>
-              <a:rPr lang="en-US" sz="2200" b="1" dirty="0">
+              <a:rPr lang="en-US" sz="2100" b="1" dirty="0">
                 <a:solidFill>
                   <a:srgbClr val="02A878"/>
                 </a:solidFill>
@@ -1424,7 +1424,7 @@
               </a:rPr>
               <a:t>기술 파트너</a:t>
             </a:r>
-            <a:endParaRPr lang="en-US" sz="2200" dirty="0"/>
+            <a:endParaRPr lang="en-US" sz="2100" dirty="0"/>
           </a:p>
         </p:txBody>
       </p:sp>
@@ -1436,8 +1436,8 @@
         </p:nvSpPr>
         <p:spPr>
           <a:xfrm>
-            <a:off x="6949440" y="3474720"/>
-            <a:ext cx="3200400" cy="274320"/>
+            <a:off x="6949440" y="2962656"/>
+            <a:ext cx="3200400" cy="256032"/>
           </a:xfrm>
           <a:prstGeom prst="rect">
             <a:avLst/>
@@ -1453,7 +1453,7 @@
               <a:buNone/>
             </a:pPr>
             <a:r>
-              <a:rPr lang="en-US" sz="1300" dirty="0">
+              <a:rPr lang="en-US" sz="1250" dirty="0">
                 <a:solidFill>
                   <a:srgbClr val="17313B"/>
                 </a:solidFill>
@@ -1463,7 +1463,7 @@
               </a:rPr>
               <a:t>요구 공동 정의 · 선제 제안 · 시스템 모델</a:t>
             </a:r>
-            <a:endParaRPr lang="en-US" sz="1300" dirty="0"/>
+            <a:endParaRPr lang="en-US" sz="1250" dirty="0"/>
           </a:p>
         </p:txBody>
       </p:sp>
@@ -1475,14 +1475,18 @@
         </p:nvSpPr>
         <p:spPr>
           <a:xfrm>
-            <a:off x="2468880" y="4901184"/>
-            <a:ext cx="7251192" cy="0"/>
-          </a:xfrm>
-          <a:prstGeom prst="line">
-            <a:avLst/>
-          </a:prstGeom>
-          <a:noFill/>
-          <a:ln w="25400">
+            <a:off x="1463040" y="3675888"/>
+            <a:ext cx="9262872" cy="731520"/>
+          </a:xfrm>
+          <a:prstGeom prst="roundRect">
+            <a:avLst>
+              <a:gd name="adj" fmla="val 10000"/>
+            </a:avLst>
+          </a:prstGeom>
+          <a:solidFill>
+            <a:srgbClr val="E8F6F0"/>
+          </a:solidFill>
+          <a:ln w="15875">
             <a:solidFill>
               <a:srgbClr val="02A878"/>
             </a:solidFill>
@@ -1490,36 +1494,145 @@
           </a:ln>
         </p:spPr>
       </p:sp>
-      <p:sp>
-        <p:nvSpPr>
-          <p:cNvPr id="21" name="Shape 17"/>
-          <p:cNvSpPr/>
-          <p:nvPr/>
-        </p:nvSpPr>
-        <p:spPr>
-          <a:xfrm>
-            <a:off x="2377440" y="4809744"/>
+      <p:pic>
+        <p:nvPicPr>
+          <p:cNvPr id="21" name="Image 2" descr="preencoded.png">    </p:cNvPr>
+          <p:cNvPicPr>
+            <a:picLocks noChangeAspect="1"/>
+          </p:cNvPicPr>
+          <p:nvPr/>
+        </p:nvPicPr>
+        <p:blipFill>
+          <a:blip r:embed="rId3"/>
+          <a:stretch>
+            <a:fillRect/>
+          </a:stretch>
+        </p:blipFill>
+        <p:spPr>
+          <a:xfrm>
+            <a:off x="1645920" y="3858768"/>
+            <a:ext cx="365760" cy="365760"/>
+          </a:xfrm>
+          <a:prstGeom prst="rect">
+            <a:avLst/>
+          </a:prstGeom>
+        </p:spPr>
+      </p:pic>
+      <p:sp>
+        <p:nvSpPr>
+          <p:cNvPr id="22" name="Text 17"/>
+          <p:cNvSpPr/>
+          <p:nvPr/>
+        </p:nvSpPr>
+        <p:spPr>
+          <a:xfrm>
+            <a:off x="2139696" y="3675888"/>
+            <a:ext cx="8403336" cy="731520"/>
+          </a:xfrm>
+          <a:prstGeom prst="rect">
+            <a:avLst/>
+          </a:prstGeom>
+          <a:noFill/>
+          <a:ln/>
+        </p:spPr>
+        <p:txBody>
+          <a:bodyPr wrap="square" lIns="0" tIns="0" rIns="0" bIns="0" rtlCol="0" anchor="ctr"/>
+          <a:lstStyle/>
+          <a:p>
+            <a:pPr indent="0" marL="0">
+              <a:lnSpc>
+                <a:spcPct val="112000"/>
+              </a:lnSpc>
+              <a:buNone/>
+            </a:pPr>
+            <a:r>
+              <a:rPr lang="en-US" sz="1450" b="1" dirty="0">
+                <a:solidFill>
+                  <a:srgbClr val="17313B"/>
+                </a:solidFill>
+                <a:latin typeface="Malgun Gothic" pitchFamily="34" charset="0"/>
+                <a:ea typeface="Malgun Gothic" pitchFamily="34" charset="-122"/>
+                <a:cs typeface="Malgun Gothic" pitchFamily="34" charset="-120"/>
+              </a:rPr>
+              <a:t>핵심 전략 — Distinguished Engineer를 스타 플레이어로, 고객사와 기술 생태계를 함께 만든다</a:t>
+            </a:r>
+            <a:endParaRPr lang="en-US" sz="1450" dirty="0"/>
+          </a:p>
+          <a:p>
+            <a:pPr indent="0" marL="0">
+              <a:lnSpc>
+                <a:spcPct val="112000"/>
+              </a:lnSpc>
+              <a:buNone/>
+            </a:pPr>
+            <a:r>
+              <a:rPr lang="en-US" sz="1150" dirty="0">
+                <a:solidFill>
+                  <a:srgbClr val="5A7184"/>
+                </a:solidFill>
+                <a:latin typeface="Malgun Gothic" pitchFamily="34" charset="0"/>
+                <a:ea typeface="Malgun Gothic" pitchFamily="34" charset="-122"/>
+                <a:cs typeface="Malgun Gothic" pitchFamily="34" charset="-120"/>
+              </a:rPr>
+              <a:t>‘모난 놈이 정 맞는’ 기존 문화에서 → 스타를 호명하고 드러내는 문화로</a:t>
+            </a:r>
+            <a:endParaRPr lang="en-US" sz="1450" dirty="0"/>
+          </a:p>
+        </p:txBody>
+      </p:sp>
+      <p:sp>
+        <p:nvSpPr>
+          <p:cNvPr id="23" name="Shape 18"/>
+          <p:cNvSpPr/>
+          <p:nvPr/>
+        </p:nvSpPr>
+        <p:spPr>
+          <a:xfrm>
+            <a:off x="2468880" y="4974336"/>
+            <a:ext cx="7251192" cy="0"/>
+          </a:xfrm>
+          <a:prstGeom prst="line">
+            <a:avLst/>
+          </a:prstGeom>
+          <a:noFill/>
+          <a:ln w="25400">
+            <a:solidFill>
+              <a:srgbClr val="C4CFD6"/>
+            </a:solidFill>
+            <a:prstDash val="solid"/>
+          </a:ln>
+        </p:spPr>
+      </p:sp>
+      <p:sp>
+        <p:nvSpPr>
+          <p:cNvPr id="24" name="Shape 19"/>
+          <p:cNvSpPr/>
+          <p:nvPr/>
+        </p:nvSpPr>
+        <p:spPr>
+          <a:xfrm>
+            <a:off x="2377440" y="4882896"/>
             <a:ext cx="182880" cy="182880"/>
           </a:xfrm>
           <a:prstGeom prst="ellipse">
             <a:avLst/>
           </a:prstGeom>
           <a:solidFill>
-            <a:srgbClr val="02A878"/>
-          </a:solidFill>
-          <a:ln/>
-        </p:spPr>
-      </p:sp>
-      <p:sp>
-        <p:nvSpPr>
-          <p:cNvPr id="22" name="Text 18"/>
-          <p:cNvSpPr/>
-          <p:nvPr/>
-        </p:nvSpPr>
-        <p:spPr>
-          <a:xfrm>
-            <a:off x="1188720" y="4480560"/>
-            <a:ext cx="2560320" cy="292608"/>
+            <a:srgbClr val="17313B"/>
+          </a:solidFill>
+          <a:ln/>
+        </p:spPr>
+      </p:sp>
+      <p:sp>
+        <p:nvSpPr>
+          <p:cNvPr id="25" name="Text 20"/>
+          <p:cNvSpPr/>
+          <p:nvPr/>
+        </p:nvSpPr>
+        <p:spPr>
+          <a:xfrm>
+            <a:off x="1188720" y="4572000"/>
+            <a:ext cx="2560320" cy="274320"/>
           </a:xfrm>
           <a:prstGeom prst="rect">
             <a:avLst/>
@@ -1535,7 +1648,7 @@
               <a:buNone/>
             </a:pPr>
             <a:r>
-              <a:rPr lang="en-US" sz="1600" b="1" dirty="0">
+              <a:rPr lang="en-US" sz="1550" b="1" dirty="0">
                 <a:solidFill>
                   <a:srgbClr val="17313B"/>
                 </a:solidFill>
@@ -1545,20 +1658,20 @@
               </a:rPr>
               <a:t>90일 증명</a:t>
             </a:r>
-            <a:endParaRPr lang="en-US" sz="1600" dirty="0"/>
-          </a:p>
-        </p:txBody>
-      </p:sp>
-      <p:sp>
-        <p:nvSpPr>
-          <p:cNvPr id="23" name="Text 19"/>
-          <p:cNvSpPr/>
-          <p:nvPr/>
-        </p:nvSpPr>
-        <p:spPr>
-          <a:xfrm>
-            <a:off x="1097280" y="5084064"/>
-            <a:ext cx="2743200" cy="256032"/>
+            <a:endParaRPr lang="en-US" sz="1550" dirty="0"/>
+          </a:p>
+        </p:txBody>
+      </p:sp>
+      <p:sp>
+        <p:nvSpPr>
+          <p:cNvPr id="26" name="Text 21"/>
+          <p:cNvSpPr/>
+          <p:nvPr/>
+        </p:nvSpPr>
+        <p:spPr>
+          <a:xfrm>
+            <a:off x="1097280" y="5138928"/>
+            <a:ext cx="2743200" cy="237744"/>
           </a:xfrm>
           <a:prstGeom prst="rect">
             <a:avLst/>
@@ -1574,7 +1687,7 @@
               <a:buNone/>
             </a:pPr>
             <a:r>
-              <a:rPr lang="en-US" sz="1200" dirty="0">
+              <a:rPr lang="en-US" sz="1150" dirty="0">
                 <a:solidFill>
                   <a:srgbClr val="5A7184"/>
                 </a:solidFill>
@@ -1584,40 +1697,40 @@
               </a:rPr>
               <a:t>Pod 1호 · 모델 v0.1</a:t>
             </a:r>
-            <a:endParaRPr lang="en-US" sz="1200" dirty="0"/>
-          </a:p>
-        </p:txBody>
-      </p:sp>
-      <p:sp>
-        <p:nvSpPr>
-          <p:cNvPr id="24" name="Shape 20"/>
-          <p:cNvSpPr/>
-          <p:nvPr/>
-        </p:nvSpPr>
-        <p:spPr>
-          <a:xfrm>
-            <a:off x="6007608" y="4809744"/>
+            <a:endParaRPr lang="en-US" sz="1150" dirty="0"/>
+          </a:p>
+        </p:txBody>
+      </p:sp>
+      <p:sp>
+        <p:nvSpPr>
+          <p:cNvPr id="27" name="Shape 22"/>
+          <p:cNvSpPr/>
+          <p:nvPr/>
+        </p:nvSpPr>
+        <p:spPr>
+          <a:xfrm>
+            <a:off x="6007608" y="4882896"/>
             <a:ext cx="182880" cy="182880"/>
           </a:xfrm>
           <a:prstGeom prst="ellipse">
             <a:avLst/>
           </a:prstGeom>
           <a:solidFill>
-            <a:srgbClr val="02A878"/>
-          </a:solidFill>
-          <a:ln/>
-        </p:spPr>
-      </p:sp>
-      <p:sp>
-        <p:nvSpPr>
-          <p:cNvPr id="25" name="Text 21"/>
-          <p:cNvSpPr/>
-          <p:nvPr/>
-        </p:nvSpPr>
-        <p:spPr>
-          <a:xfrm>
-            <a:off x="4818888" y="4480560"/>
-            <a:ext cx="2560320" cy="292608"/>
+            <a:srgbClr val="17313B"/>
+          </a:solidFill>
+          <a:ln/>
+        </p:spPr>
+      </p:sp>
+      <p:sp>
+        <p:nvSpPr>
+          <p:cNvPr id="28" name="Text 23"/>
+          <p:cNvSpPr/>
+          <p:nvPr/>
+        </p:nvSpPr>
+        <p:spPr>
+          <a:xfrm>
+            <a:off x="4818888" y="4572000"/>
+            <a:ext cx="2560320" cy="274320"/>
           </a:xfrm>
           <a:prstGeom prst="rect">
             <a:avLst/>
@@ -1633,7 +1746,7 @@
               <a:buNone/>
             </a:pPr>
             <a:r>
-              <a:rPr lang="en-US" sz="1600" b="1" dirty="0">
+              <a:rPr lang="en-US" sz="1550" b="1" dirty="0">
                 <a:solidFill>
                   <a:srgbClr val="17313B"/>
                 </a:solidFill>
@@ -1643,20 +1756,20 @@
               </a:rPr>
               <a:t>1년 제도화</a:t>
             </a:r>
-            <a:endParaRPr lang="en-US" sz="1600" dirty="0"/>
-          </a:p>
-        </p:txBody>
-      </p:sp>
-      <p:sp>
-        <p:nvSpPr>
-          <p:cNvPr id="26" name="Text 22"/>
-          <p:cNvSpPr/>
-          <p:nvPr/>
-        </p:nvSpPr>
-        <p:spPr>
-          <a:xfrm>
-            <a:off x="4727448" y="5084064"/>
-            <a:ext cx="2743200" cy="256032"/>
+            <a:endParaRPr lang="en-US" sz="1550" dirty="0"/>
+          </a:p>
+        </p:txBody>
+      </p:sp>
+      <p:sp>
+        <p:nvSpPr>
+          <p:cNvPr id="29" name="Text 24"/>
+          <p:cNvSpPr/>
+          <p:nvPr/>
+        </p:nvSpPr>
+        <p:spPr>
+          <a:xfrm>
+            <a:off x="4727448" y="5138928"/>
+            <a:ext cx="2743200" cy="237744"/>
           </a:xfrm>
           <a:prstGeom prst="rect">
             <a:avLst/>
@@ -1672,7 +1785,7 @@
               <a:buNone/>
             </a:pPr>
             <a:r>
-              <a:rPr lang="en-US" sz="1200" dirty="0">
+              <a:rPr lang="en-US" sz="1150" dirty="0">
                 <a:solidFill>
                   <a:srgbClr val="5A7184"/>
                 </a:solidFill>
@@ -1682,40 +1795,40 @@
               </a:rPr>
               <a:t>Pod 3~5 · SCA 1건</a:t>
             </a:r>
-            <a:endParaRPr lang="en-US" sz="1200" dirty="0"/>
-          </a:p>
-        </p:txBody>
-      </p:sp>
-      <p:sp>
-        <p:nvSpPr>
-          <p:cNvPr id="27" name="Shape 23"/>
-          <p:cNvSpPr/>
-          <p:nvPr/>
-        </p:nvSpPr>
-        <p:spPr>
-          <a:xfrm>
-            <a:off x="9628632" y="4809744"/>
+            <a:endParaRPr lang="en-US" sz="1150" dirty="0"/>
+          </a:p>
+        </p:txBody>
+      </p:sp>
+      <p:sp>
+        <p:nvSpPr>
+          <p:cNvPr id="30" name="Shape 25"/>
+          <p:cNvSpPr/>
+          <p:nvPr/>
+        </p:nvSpPr>
+        <p:spPr>
+          <a:xfrm>
+            <a:off x="9628632" y="4882896"/>
             <a:ext cx="182880" cy="182880"/>
           </a:xfrm>
           <a:prstGeom prst="ellipse">
             <a:avLst/>
           </a:prstGeom>
           <a:solidFill>
-            <a:srgbClr val="02A878"/>
-          </a:solidFill>
-          <a:ln/>
-        </p:spPr>
-      </p:sp>
-      <p:sp>
-        <p:nvSpPr>
-          <p:cNvPr id="28" name="Text 24"/>
-          <p:cNvSpPr/>
-          <p:nvPr/>
-        </p:nvSpPr>
-        <p:spPr>
-          <a:xfrm>
-            <a:off x="8439912" y="4480560"/>
-            <a:ext cx="2560320" cy="292608"/>
+            <a:srgbClr val="17313B"/>
+          </a:solidFill>
+          <a:ln/>
+        </p:spPr>
+      </p:sp>
+      <p:sp>
+        <p:nvSpPr>
+          <p:cNvPr id="31" name="Text 26"/>
+          <p:cNvSpPr/>
+          <p:nvPr/>
+        </p:nvSpPr>
+        <p:spPr>
+          <a:xfrm>
+            <a:off x="8439912" y="4572000"/>
+            <a:ext cx="2560320" cy="274320"/>
           </a:xfrm>
           <a:prstGeom prst="rect">
             <a:avLst/>
@@ -1731,7 +1844,7 @@
               <a:buNone/>
             </a:pPr>
             <a:r>
-              <a:rPr lang="en-US" sz="1600" b="1" dirty="0">
+              <a:rPr lang="en-US" sz="1550" b="1" dirty="0">
                 <a:solidFill>
                   <a:srgbClr val="17313B"/>
                 </a:solidFill>
@@ -1741,20 +1854,20 @@
               </a:rPr>
               <a:t>3년 표준화</a:t>
             </a:r>
-            <a:endParaRPr lang="en-US" sz="1600" dirty="0"/>
-          </a:p>
-        </p:txBody>
-      </p:sp>
-      <p:sp>
-        <p:nvSpPr>
-          <p:cNvPr id="29" name="Text 25"/>
-          <p:cNvSpPr/>
-          <p:nvPr/>
-        </p:nvSpPr>
-        <p:spPr>
-          <a:xfrm>
-            <a:off x="8348472" y="5084064"/>
-            <a:ext cx="2743200" cy="256032"/>
+            <a:endParaRPr lang="en-US" sz="1550" dirty="0"/>
+          </a:p>
+        </p:txBody>
+      </p:sp>
+      <p:sp>
+        <p:nvSpPr>
+          <p:cNvPr id="32" name="Text 27"/>
+          <p:cNvSpPr/>
+          <p:nvPr/>
+        </p:nvSpPr>
+        <p:spPr>
+          <a:xfrm>
+            <a:off x="8348472" y="5138928"/>
+            <a:ext cx="2743200" cy="237744"/>
           </a:xfrm>
           <a:prstGeom prst="rect">
             <a:avLst/>
@@ -1770,7 +1883,7 @@
               <a:buNone/>
             </a:pPr>
             <a:r>
-              <a:rPr lang="en-US" sz="1200" dirty="0">
+              <a:rPr lang="en-US" sz="1150" dirty="0">
                 <a:solidFill>
                   <a:srgbClr val="5A7184"/>
                 </a:solidFill>
@@ -1780,19 +1893,19 @@
               </a:rPr>
               <a:t>플랫폼 · 커스텀 30%+</a:t>
             </a:r>
-            <a:endParaRPr lang="en-US" sz="1200" dirty="0"/>
-          </a:p>
-        </p:txBody>
-      </p:sp>
-      <p:sp>
-        <p:nvSpPr>
-          <p:cNvPr id="30" name="Text 26"/>
-          <p:cNvSpPr/>
-          <p:nvPr/>
-        </p:nvSpPr>
-        <p:spPr>
-          <a:xfrm>
-            <a:off x="457200" y="5650992"/>
+            <a:endParaRPr lang="en-US" sz="1150" dirty="0"/>
+          </a:p>
+        </p:txBody>
+      </p:sp>
+      <p:sp>
+        <p:nvSpPr>
+          <p:cNvPr id="33" name="Text 28"/>
+          <p:cNvSpPr/>
+          <p:nvPr/>
+        </p:nvSpPr>
+        <p:spPr>
+          <a:xfrm>
+            <a:off x="457200" y="5596128"/>
             <a:ext cx="11274552" cy="548640"/>
           </a:xfrm>
           <a:prstGeom prst="rect">

--- a/dashboard/public/downloads/dev-transformation-summary-low.pptx
+++ b/dashboard/public/downloads/dev-transformation-summary-low.pptx
@@ -1036,12 +1036,12 @@
         </p:nvSpPr>
         <p:spPr>
           <a:xfrm>
-            <a:off x="914400" y="932688"/>
-            <a:ext cx="10360152" cy="822960"/>
+            <a:off x="457200" y="932688"/>
+            <a:ext cx="5541264" cy="859536"/>
           </a:xfrm>
           <a:prstGeom prst="roundRect">
             <a:avLst>
-              <a:gd name="adj" fmla="val 11111"/>
+              <a:gd name="adj" fmla="val 9574"/>
             </a:avLst>
           </a:prstGeom>
           <a:solidFill>
@@ -1058,8 +1058,8 @@
         </p:nvSpPr>
         <p:spPr>
           <a:xfrm>
-            <a:off x="1097280" y="1005840"/>
-            <a:ext cx="9994392" cy="420624"/>
+            <a:off x="640080" y="1005840"/>
+            <a:ext cx="5175504" cy="457200"/>
           </a:xfrm>
           <a:prstGeom prst="rect">
             <a:avLst/>
@@ -1072,10 +1072,13 @@
           <a:lstStyle/>
           <a:p>
             <a:pPr algn="ctr" indent="0" marL="0">
+              <a:lnSpc>
+                <a:spcPct val="105000"/>
+              </a:lnSpc>
               <a:buNone/>
             </a:pPr>
             <a:r>
-              <a:rPr lang="en-US" sz="2200" b="1" i="1" dirty="0">
+              <a:rPr lang="en-US" sz="1450" b="1" i="1" dirty="0">
                 <a:solidFill>
                   <a:srgbClr val="17313B"/>
                 </a:solidFill>
@@ -1085,7 +1088,7 @@
               </a:rPr>
               <a:t>“고객의 아키텍처 안으로 들어가 수요를 함께 설계하는 기업이 이긴다”</a:t>
             </a:r>
-            <a:endParaRPr lang="en-US" sz="2200" dirty="0"/>
+            <a:endParaRPr lang="en-US" sz="1450" dirty="0"/>
           </a:p>
         </p:txBody>
       </p:sp>
@@ -1097,8 +1100,8 @@
         </p:nvSpPr>
         <p:spPr>
           <a:xfrm>
-            <a:off x="1097280" y="1426464"/>
-            <a:ext cx="9994392" cy="237744"/>
+            <a:off x="640080" y="1490472"/>
+            <a:ext cx="5175504" cy="219456"/>
           </a:xfrm>
           <a:prstGeom prst="rect">
             <a:avLst/>
@@ -1114,7 +1117,7 @@
               <a:buNone/>
             </a:pPr>
             <a:r>
-              <a:rPr lang="en-US" sz="1250" dirty="0">
+              <a:rPr lang="en-US" sz="1050" dirty="0">
                 <a:solidFill>
                   <a:srgbClr val="5A7184"/>
                 </a:solidFill>
@@ -1124,13 +1127,116 @@
               </a:rPr>
               <a:t>— 신문섭 파트너, AI 인프라 슈퍼사이클 인터뷰 (2026-06)</a:t>
             </a:r>
-            <a:endParaRPr lang="en-US" sz="1250" dirty="0"/>
+            <a:endParaRPr lang="en-US" sz="1050" dirty="0"/>
           </a:p>
         </p:txBody>
       </p:sp>
       <p:sp>
         <p:nvSpPr>
           <p:cNvPr id="9" name="Shape 7"/>
+          <p:cNvSpPr/>
+          <p:nvPr/>
+        </p:nvSpPr>
+        <p:spPr>
+          <a:xfrm>
+            <a:off x="6190488" y="932688"/>
+            <a:ext cx="5541264" cy="859536"/>
+          </a:xfrm>
+          <a:prstGeom prst="roundRect">
+            <a:avLst>
+              <a:gd name="adj" fmla="val 9574"/>
+            </a:avLst>
+          </a:prstGeom>
+          <a:solidFill>
+            <a:srgbClr val="F5F7F8"/>
+          </a:solidFill>
+          <a:ln/>
+        </p:spPr>
+      </p:sp>
+      <p:sp>
+        <p:nvSpPr>
+          <p:cNvPr id="10" name="Text 8"/>
+          <p:cNvSpPr/>
+          <p:nvPr/>
+        </p:nvSpPr>
+        <p:spPr>
+          <a:xfrm>
+            <a:off x="6373368" y="1005840"/>
+            <a:ext cx="5175504" cy="457200"/>
+          </a:xfrm>
+          <a:prstGeom prst="rect">
+            <a:avLst/>
+          </a:prstGeom>
+          <a:noFill/>
+          <a:ln/>
+        </p:spPr>
+        <p:txBody>
+          <a:bodyPr wrap="square" lIns="0" tIns="0" rIns="0" bIns="0" rtlCol="0" anchor="ctr"/>
+          <a:lstStyle/>
+          <a:p>
+            <a:pPr algn="ctr" indent="0" marL="0">
+              <a:lnSpc>
+                <a:spcPct val="105000"/>
+              </a:lnSpc>
+              <a:buNone/>
+            </a:pPr>
+            <a:r>
+              <a:rPr lang="en-US" sz="1450" b="1" i="1" dirty="0">
+                <a:solidFill>
+                  <a:srgbClr val="17313B"/>
+                </a:solidFill>
+                <a:latin typeface="Malgun Gothic" pitchFamily="34" charset="0"/>
+                <a:ea typeface="Malgun Gothic" pitchFamily="34" charset="-122"/>
+                <a:cs typeface="Malgun Gothic" pitchFamily="34" charset="-120"/>
+              </a:rPr>
+              <a:t>“조직의 이름 뒤에 숨지 않고, 자신의 이름으로 불리며 책임과 결과를 마주한다”</a:t>
+            </a:r>
+            <a:endParaRPr lang="en-US" sz="1450" dirty="0"/>
+          </a:p>
+        </p:txBody>
+      </p:sp>
+      <p:sp>
+        <p:nvSpPr>
+          <p:cNvPr id="11" name="Text 9"/>
+          <p:cNvSpPr/>
+          <p:nvPr/>
+        </p:nvSpPr>
+        <p:spPr>
+          <a:xfrm>
+            <a:off x="6373368" y="1490472"/>
+            <a:ext cx="5175504" cy="219456"/>
+          </a:xfrm>
+          <a:prstGeom prst="rect">
+            <a:avLst/>
+          </a:prstGeom>
+          <a:noFill/>
+          <a:ln/>
+        </p:spPr>
+        <p:txBody>
+          <a:bodyPr wrap="square" lIns="0" tIns="0" rIns="0" bIns="0" rtlCol="0" anchor="ctr"/>
+          <a:lstStyle/>
+          <a:p>
+            <a:pPr algn="ctr" indent="0" marL="0">
+              <a:buNone/>
+            </a:pPr>
+            <a:r>
+              <a:rPr lang="en-US" sz="1050" dirty="0">
+                <a:solidFill>
+                  <a:srgbClr val="5A7184"/>
+                </a:solidFill>
+                <a:latin typeface="Malgun Gothic" pitchFamily="34" charset="0"/>
+                <a:ea typeface="Malgun Gothic" pitchFamily="34" charset="-122"/>
+                <a:cs typeface="Malgun Gothic" pitchFamily="34" charset="-120"/>
+              </a:rPr>
+              <a:t>— 송길영, 『시대예보: 호명사회』 (2024)</a:t>
+            </a:r>
+            <a:endParaRPr lang="en-US" sz="1050" dirty="0"/>
+          </a:p>
+        </p:txBody>
+      </p:sp>
+      <p:sp>
+        <p:nvSpPr>
+          <p:cNvPr id="12" name="Shape 10"/>
           <p:cNvSpPr/>
           <p:nvPr/>
         </p:nvSpPr>
@@ -1157,7 +1263,7 @@
       </p:sp>
       <p:sp>
         <p:nvSpPr>
-          <p:cNvPr id="10" name="Shape 8"/>
+          <p:cNvPr id="13" name="Shape 11"/>
           <p:cNvSpPr/>
           <p:nvPr/>
         </p:nvSpPr>
@@ -1177,7 +1283,7 @@
       </p:sp>
       <p:pic>
         <p:nvPicPr>
-          <p:cNvPr id="11" name="Image 0" descr="preencoded.png">    </p:cNvPr>
+          <p:cNvPr id="14" name="Image 0" descr="preencoded.png">    </p:cNvPr>
           <p:cNvPicPr>
             <a:picLocks noChangeAspect="1"/>
           </p:cNvPicPr>
@@ -1201,7 +1307,7 @@
       </p:pic>
       <p:sp>
         <p:nvSpPr>
-          <p:cNvPr id="12" name="Text 9"/>
+          <p:cNvPr id="15" name="Text 12"/>
           <p:cNvSpPr/>
           <p:nvPr/>
         </p:nvSpPr>
@@ -1240,7 +1346,7 @@
       </p:sp>
       <p:sp>
         <p:nvSpPr>
-          <p:cNvPr id="13" name="Text 10"/>
+          <p:cNvPr id="16" name="Text 13"/>
           <p:cNvSpPr/>
           <p:nvPr/>
         </p:nvSpPr>
@@ -1279,7 +1385,7 @@
       </p:sp>
       <p:sp>
         <p:nvSpPr>
-          <p:cNvPr id="14" name="Text 11"/>
+          <p:cNvPr id="17" name="Text 14"/>
           <p:cNvSpPr/>
           <p:nvPr/>
         </p:nvSpPr>
@@ -1320,7 +1426,7 @@
       </p:sp>
       <p:sp>
         <p:nvSpPr>
-          <p:cNvPr id="15" name="Shape 12"/>
+          <p:cNvPr id="18" name="Shape 15"/>
           <p:cNvSpPr/>
           <p:nvPr/>
         </p:nvSpPr>
@@ -1347,7 +1453,7 @@
       </p:sp>
       <p:sp>
         <p:nvSpPr>
-          <p:cNvPr id="16" name="Shape 13"/>
+          <p:cNvPr id="19" name="Shape 16"/>
           <p:cNvSpPr/>
           <p:nvPr/>
         </p:nvSpPr>
@@ -1367,7 +1473,7 @@
       </p:sp>
       <p:pic>
         <p:nvPicPr>
-          <p:cNvPr id="17" name="Image 1" descr="preencoded.png">    </p:cNvPr>
+          <p:cNvPr id="20" name="Image 1" descr="preencoded.png">    </p:cNvPr>
           <p:cNvPicPr>
             <a:picLocks noChangeAspect="1"/>
           </p:cNvPicPr>
@@ -1391,7 +1497,7 @@
       </p:pic>
       <p:sp>
         <p:nvSpPr>
-          <p:cNvPr id="18" name="Text 14"/>
+          <p:cNvPr id="21" name="Text 17"/>
           <p:cNvSpPr/>
           <p:nvPr/>
         </p:nvSpPr>
@@ -1430,7 +1536,7 @@
       </p:sp>
       <p:sp>
         <p:nvSpPr>
-          <p:cNvPr id="19" name="Text 15"/>
+          <p:cNvPr id="22" name="Text 18"/>
           <p:cNvSpPr/>
           <p:nvPr/>
         </p:nvSpPr>
@@ -1469,7 +1575,7 @@
       </p:sp>
       <p:sp>
         <p:nvSpPr>
-          <p:cNvPr id="20" name="Shape 16"/>
+          <p:cNvPr id="23" name="Shape 19"/>
           <p:cNvSpPr/>
           <p:nvPr/>
         </p:nvSpPr>
@@ -1496,7 +1602,7 @@
       </p:sp>
       <p:pic>
         <p:nvPicPr>
-          <p:cNvPr id="21" name="Image 2" descr="preencoded.png">    </p:cNvPr>
+          <p:cNvPr id="24" name="Image 2" descr="preencoded.png">    </p:cNvPr>
           <p:cNvPicPr>
             <a:picLocks noChangeAspect="1"/>
           </p:cNvPicPr>
@@ -1520,7 +1626,7 @@
       </p:pic>
       <p:sp>
         <p:nvSpPr>
-          <p:cNvPr id="22" name="Text 17"/>
+          <p:cNvPr id="25" name="Text 20"/>
           <p:cNvSpPr/>
           <p:nvPr/>
         </p:nvSpPr>
@@ -1582,7 +1688,7 @@
       </p:sp>
       <p:sp>
         <p:nvSpPr>
-          <p:cNvPr id="23" name="Shape 18"/>
+          <p:cNvPr id="26" name="Shape 21"/>
           <p:cNvSpPr/>
           <p:nvPr/>
         </p:nvSpPr>
@@ -1605,7 +1711,7 @@
       </p:sp>
       <p:sp>
         <p:nvSpPr>
-          <p:cNvPr id="24" name="Shape 19"/>
+          <p:cNvPr id="27" name="Shape 22"/>
           <p:cNvSpPr/>
           <p:nvPr/>
         </p:nvSpPr>
@@ -1625,7 +1731,7 @@
       </p:sp>
       <p:sp>
         <p:nvSpPr>
-          <p:cNvPr id="25" name="Text 20"/>
+          <p:cNvPr id="28" name="Text 23"/>
           <p:cNvSpPr/>
           <p:nvPr/>
         </p:nvSpPr>
@@ -1664,7 +1770,7 @@
       </p:sp>
       <p:sp>
         <p:nvSpPr>
-          <p:cNvPr id="26" name="Text 21"/>
+          <p:cNvPr id="29" name="Text 24"/>
           <p:cNvSpPr/>
           <p:nvPr/>
         </p:nvSpPr>
@@ -1703,7 +1809,7 @@
       </p:sp>
       <p:sp>
         <p:nvSpPr>
-          <p:cNvPr id="27" name="Shape 22"/>
+          <p:cNvPr id="30" name="Shape 25"/>
           <p:cNvSpPr/>
           <p:nvPr/>
         </p:nvSpPr>
@@ -1723,7 +1829,7 @@
       </p:sp>
       <p:sp>
         <p:nvSpPr>
-          <p:cNvPr id="28" name="Text 23"/>
+          <p:cNvPr id="31" name="Text 26"/>
           <p:cNvSpPr/>
           <p:nvPr/>
         </p:nvSpPr>
@@ -1762,7 +1868,7 @@
       </p:sp>
       <p:sp>
         <p:nvSpPr>
-          <p:cNvPr id="29" name="Text 24"/>
+          <p:cNvPr id="32" name="Text 27"/>
           <p:cNvSpPr/>
           <p:nvPr/>
         </p:nvSpPr>
@@ -1801,7 +1907,7 @@
       </p:sp>
       <p:sp>
         <p:nvSpPr>
-          <p:cNvPr id="30" name="Shape 25"/>
+          <p:cNvPr id="33" name="Shape 28"/>
           <p:cNvSpPr/>
           <p:nvPr/>
         </p:nvSpPr>
@@ -1821,7 +1927,7 @@
       </p:sp>
       <p:sp>
         <p:nvSpPr>
-          <p:cNvPr id="31" name="Text 26"/>
+          <p:cNvPr id="34" name="Text 29"/>
           <p:cNvSpPr/>
           <p:nvPr/>
         </p:nvSpPr>
@@ -1860,7 +1966,7 @@
       </p:sp>
       <p:sp>
         <p:nvSpPr>
-          <p:cNvPr id="32" name="Text 27"/>
+          <p:cNvPr id="35" name="Text 30"/>
           <p:cNvSpPr/>
           <p:nvPr/>
         </p:nvSpPr>
@@ -1899,7 +2005,7 @@
       </p:sp>
       <p:sp>
         <p:nvSpPr>
-          <p:cNvPr id="33" name="Text 28"/>
+          <p:cNvPr id="36" name="Text 31"/>
           <p:cNvSpPr/>
           <p:nvPr/>
         </p:nvSpPr>

--- a/dashboard/public/downloads/dev-transformation-summary-low.pptx
+++ b/dashboard/public/downloads/dev-transformation-summary-low.pptx
@@ -1391,8 +1391,8 @@
         </p:nvSpPr>
         <p:spPr>
           <a:xfrm>
-            <a:off x="5349240" y="2286000"/>
-            <a:ext cx="1463040" cy="822960"/>
+            <a:off x="5285232" y="2286000"/>
+            <a:ext cx="1591056" cy="822960"/>
           </a:xfrm>
           <a:prstGeom prst="rightArrow">
             <a:avLst/>
@@ -1407,10 +1407,13 @@
           <a:lstStyle/>
           <a:p>
             <a:pPr algn="ctr" indent="0" marL="0">
+              <a:lnSpc>
+                <a:spcPct val="105000"/>
+              </a:lnSpc>
               <a:buNone/>
             </a:pPr>
             <a:r>
-              <a:rPr lang="en-US" sz="1300" b="1" dirty="0">
+              <a:rPr lang="en-US" sz="1100" b="1" dirty="0">
                 <a:solidFill>
                   <a:srgbClr val="FFFFFF"/>
                 </a:solidFill>
@@ -1418,9 +1421,29 @@
                 <a:ea typeface="Malgun Gothic" pitchFamily="34" charset="-122"/>
                 <a:cs typeface="Malgun Gothic" pitchFamily="34" charset="-120"/>
               </a:rPr>
-              <a:t>LTA → SCA</a:t>
-            </a:r>
-            <a:endParaRPr lang="en-US" sz="1300" dirty="0"/>
+              <a:t>LTA →</a:t>
+            </a:r>
+            <a:endParaRPr lang="en-US" sz="1100" dirty="0"/>
+          </a:p>
+          <a:p>
+            <a:pPr algn="ctr" indent="0" marL="0">
+              <a:lnSpc>
+                <a:spcPct val="105000"/>
+              </a:lnSpc>
+              <a:buNone/>
+            </a:pPr>
+            <a:r>
+              <a:rPr lang="en-US" sz="1100" b="1" dirty="0">
+                <a:solidFill>
+                  <a:srgbClr val="FFFFFF"/>
+                </a:solidFill>
+                <a:latin typeface="Malgun Gothic" pitchFamily="34" charset="0"/>
+                <a:ea typeface="Malgun Gothic" pitchFamily="34" charset="-122"/>
+                <a:cs typeface="Malgun Gothic" pitchFamily="34" charset="-120"/>
+              </a:rPr>
+              <a:t>전략적 고객 계약</a:t>
+            </a:r>
+            <a:endParaRPr lang="en-US" sz="1100" dirty="0"/>
           </a:p>
         </p:txBody>
       </p:sp>
@@ -1660,7 +1683,7 @@
                 <a:ea typeface="Malgun Gothic" pitchFamily="34" charset="-122"/>
                 <a:cs typeface="Malgun Gothic" pitchFamily="34" charset="-120"/>
               </a:rPr>
-              <a:t>핵심 전략 — Distinguished Engineer를 스타 플레이어로, 고객사와 기술 생태계를 함께 만든다</a:t>
+              <a:t>핵심 전략 — FDE(Forward Deployed Engineer)를 스타 플레이어로, 고객사와 기술 생태계를 함께 만든다</a:t>
             </a:r>
             <a:endParaRPr lang="en-US" sz="1450" dirty="0"/>
           </a:p>
@@ -1899,7 +1922,7 @@
                 <a:ea typeface="Malgun Gothic" pitchFamily="34" charset="-122"/>
                 <a:cs typeface="Malgun Gothic" pitchFamily="34" charset="-120"/>
               </a:rPr>
-              <a:t>Pod 3~5 · SCA 1건</a:t>
+              <a:t>Pod 3~5 · 전략적 고객 계약 1건</a:t>
             </a:r>
             <a:endParaRPr lang="en-US" sz="1150" dirty="0"/>
           </a:p>
@@ -2050,7 +2073,7 @@
                 <a:ea typeface="Malgun Gothic" pitchFamily="34" charset="-122"/>
                 <a:cs typeface="Malgun Gothic" pitchFamily="34" charset="-120"/>
               </a:rPr>
-              <a:t>   SCA 최소 계약매출 — 공동설계 없이는 참여할 수 없는 시장 (Micron IR, 2026-06)</a:t>
+              <a:t>   전략적 고객 계약 최소 계약매출 — 공동설계 없이는 참여할 수 없는 시장 (Micron IR, 2026-06)</a:t>
             </a:r>
             <a:endParaRPr lang="en-US" sz="3200" dirty="0"/>
           </a:p>

--- a/dashboard/public/downloads/dev-transformation-summary-low.pptx
+++ b/dashboard/public/downloads/dev-transformation-summary-low.pptx
@@ -1711,57 +1711,14 @@
       </p:sp>
       <p:sp>
         <p:nvSpPr>
-          <p:cNvPr id="26" name="Shape 21"/>
-          <p:cNvSpPr/>
-          <p:nvPr/>
-        </p:nvSpPr>
-        <p:spPr>
-          <a:xfrm>
-            <a:off x="2468880" y="4974336"/>
-            <a:ext cx="7251192" cy="0"/>
-          </a:xfrm>
-          <a:prstGeom prst="line">
-            <a:avLst/>
-          </a:prstGeom>
-          <a:noFill/>
-          <a:ln w="25400">
-            <a:solidFill>
-              <a:srgbClr val="C4CFD6"/>
-            </a:solidFill>
-            <a:prstDash val="solid"/>
-          </a:ln>
-        </p:spPr>
-      </p:sp>
-      <p:sp>
-        <p:nvSpPr>
-          <p:cNvPr id="27" name="Shape 22"/>
-          <p:cNvSpPr/>
-          <p:nvPr/>
-        </p:nvSpPr>
-        <p:spPr>
-          <a:xfrm>
-            <a:off x="2377440" y="4882896"/>
-            <a:ext cx="182880" cy="182880"/>
-          </a:xfrm>
-          <a:prstGeom prst="ellipse">
-            <a:avLst/>
-          </a:prstGeom>
-          <a:solidFill>
-            <a:srgbClr val="17313B"/>
-          </a:solidFill>
-          <a:ln/>
-        </p:spPr>
-      </p:sp>
-      <p:sp>
-        <p:nvSpPr>
-          <p:cNvPr id="28" name="Text 23"/>
-          <p:cNvSpPr/>
-          <p:nvPr/>
-        </p:nvSpPr>
-        <p:spPr>
-          <a:xfrm>
-            <a:off x="1188720" y="4572000"/>
-            <a:ext cx="2560320" cy="274320"/>
+          <p:cNvPr id="26" name="Text 21"/>
+          <p:cNvSpPr/>
+          <p:nvPr/>
+        </p:nvSpPr>
+        <p:spPr>
+          <a:xfrm>
+            <a:off x="457200" y="4773168"/>
+            <a:ext cx="11274552" cy="292608"/>
           </a:xfrm>
           <a:prstGeom prst="rect">
             <a:avLst/>
@@ -1777,7 +1734,7 @@
               <a:buNone/>
             </a:pPr>
             <a:r>
-              <a:rPr lang="en-US" sz="1550" b="1" dirty="0">
+              <a:rPr lang="en-US" sz="1500" b="1" dirty="0">
                 <a:solidFill>
                   <a:srgbClr val="17313B"/>
                 </a:solidFill>
@@ -1785,22 +1742,92 @@
                 <a:ea typeface="Malgun Gothic" pitchFamily="34" charset="-122"/>
                 <a:cs typeface="Malgun Gothic" pitchFamily="34" charset="-120"/>
               </a:rPr>
-              <a:t>90일 증명</a:t>
-            </a:r>
-            <a:endParaRPr lang="en-US" sz="1550" dirty="0"/>
-          </a:p>
-        </p:txBody>
-      </p:sp>
-      <p:sp>
-        <p:nvSpPr>
-          <p:cNvPr id="29" name="Text 24"/>
-          <p:cNvSpPr/>
-          <p:nvPr/>
-        </p:nvSpPr>
-        <p:spPr>
-          <a:xfrm>
-            <a:off x="1097280" y="5138928"/>
-            <a:ext cx="2743200" cy="237744"/>
+              <a:t>환경도 바뀌었다 — 스타를 영입할 수 있는 임금 수준</a:t>
+            </a:r>
+            <a:endParaRPr lang="en-US" sz="1500" dirty="0"/>
+          </a:p>
+        </p:txBody>
+      </p:sp>
+      <p:sp>
+        <p:nvSpPr>
+          <p:cNvPr id="27" name="Text 22"/>
+          <p:cNvSpPr/>
+          <p:nvPr/>
+        </p:nvSpPr>
+        <p:spPr>
+          <a:xfrm>
+            <a:off x="749808" y="5157216"/>
+            <a:ext cx="3108960" cy="804672"/>
+          </a:xfrm>
+          <a:prstGeom prst="roundRect">
+            <a:avLst>
+              <a:gd name="adj" fmla="val 9091"/>
+            </a:avLst>
+          </a:prstGeom>
+          <a:solidFill>
+            <a:srgbClr val="E7ECEF"/>
+          </a:solidFill>
+          <a:ln w="15875">
+            <a:solidFill>
+              <a:srgbClr val="DCE4E9"/>
+            </a:solidFill>
+          </a:ln>
+        </p:spPr>
+        <p:txBody>
+          <a:bodyPr wrap="square" lIns="0" tIns="0" rIns="0" bIns="0" rtlCol="0" anchor="ctr"/>
+          <a:lstStyle/>
+          <a:p>
+            <a:pPr algn="ctr" indent="0" marL="0">
+              <a:lnSpc>
+                <a:spcPct val="108000"/>
+              </a:lnSpc>
+              <a:buNone/>
+            </a:pPr>
+            <a:r>
+              <a:rPr lang="en-US" sz="1350" b="1" dirty="0">
+                <a:solidFill>
+                  <a:srgbClr val="5A7184"/>
+                </a:solidFill>
+                <a:latin typeface="Malgun Gothic" pitchFamily="34" charset="0"/>
+                <a:ea typeface="Malgun Gothic" pitchFamily="34" charset="-122"/>
+                <a:cs typeface="Malgun Gothic" pitchFamily="34" charset="-120"/>
+              </a:rPr>
+              <a:t>과거</a:t>
+            </a:r>
+            <a:endParaRPr lang="en-US" sz="1350" dirty="0"/>
+          </a:p>
+          <a:p>
+            <a:pPr algn="ctr" indent="0" marL="0">
+              <a:lnSpc>
+                <a:spcPct val="108000"/>
+              </a:lnSpc>
+              <a:buNone/>
+            </a:pPr>
+            <a:r>
+              <a:rPr lang="en-US" sz="1150" dirty="0">
+                <a:solidFill>
+                  <a:srgbClr val="5A7184"/>
+                </a:solidFill>
+                <a:latin typeface="Malgun Gothic" pitchFamily="34" charset="0"/>
+                <a:ea typeface="Malgun Gothic" pitchFamily="34" charset="-122"/>
+                <a:cs typeface="Malgun Gothic" pitchFamily="34" charset="-120"/>
+              </a:rPr>
+              <a:t>실리콘밸리 수준에 못 미친 보상</a:t>
+            </a:r>
+            <a:endParaRPr lang="en-US" sz="1350" dirty="0"/>
+          </a:p>
+        </p:txBody>
+      </p:sp>
+      <p:sp>
+        <p:nvSpPr>
+          <p:cNvPr id="28" name="Text 23"/>
+          <p:cNvSpPr/>
+          <p:nvPr/>
+        </p:nvSpPr>
+        <p:spPr>
+          <a:xfrm>
+            <a:off x="3858768" y="5157216"/>
+            <a:ext cx="274320" cy="804672"/>
           </a:xfrm>
           <a:prstGeom prst="rect">
             <a:avLst/>
@@ -1816,6 +1843,76 @@
               <a:buNone/>
             </a:pPr>
             <a:r>
+              <a:rPr lang="en-US" sz="1400" dirty="0">
+                <a:solidFill>
+                  <a:srgbClr val="5A7184"/>
+                </a:solidFill>
+                <a:latin typeface="Malgun Gothic" pitchFamily="34" charset="0"/>
+                <a:ea typeface="Malgun Gothic" pitchFamily="34" charset="-122"/>
+                <a:cs typeface="Malgun Gothic" pitchFamily="34" charset="-120"/>
+              </a:rPr>
+              <a:t>▶</a:t>
+            </a:r>
+            <a:endParaRPr lang="en-US" sz="1400" dirty="0"/>
+          </a:p>
+        </p:txBody>
+      </p:sp>
+      <p:sp>
+        <p:nvSpPr>
+          <p:cNvPr id="29" name="Text 24"/>
+          <p:cNvSpPr/>
+          <p:nvPr/>
+        </p:nvSpPr>
+        <p:spPr>
+          <a:xfrm>
+            <a:off x="4133088" y="5157216"/>
+            <a:ext cx="3383280" cy="804672"/>
+          </a:xfrm>
+          <a:prstGeom prst="roundRect">
+            <a:avLst>
+              <a:gd name="adj" fmla="val 9091"/>
+            </a:avLst>
+          </a:prstGeom>
+          <a:solidFill>
+            <a:srgbClr val="FFFFFF"/>
+          </a:solidFill>
+          <a:ln w="15875">
+            <a:solidFill>
+              <a:srgbClr val="DCE4E9"/>
+            </a:solidFill>
+          </a:ln>
+        </p:spPr>
+        <p:txBody>
+          <a:bodyPr wrap="square" lIns="0" tIns="0" rIns="0" bIns="0" rtlCol="0" anchor="ctr"/>
+          <a:lstStyle/>
+          <a:p>
+            <a:pPr algn="ctr" indent="0" marL="0">
+              <a:lnSpc>
+                <a:spcPct val="108000"/>
+              </a:lnSpc>
+              <a:buNone/>
+            </a:pPr>
+            <a:r>
+              <a:rPr lang="en-US" sz="1350" b="1" dirty="0">
+                <a:solidFill>
+                  <a:srgbClr val="17313B"/>
+                </a:solidFill>
+                <a:latin typeface="Malgun Gothic" pitchFamily="34" charset="0"/>
+                <a:ea typeface="Malgun Gothic" pitchFamily="34" charset="-122"/>
+                <a:cs typeface="Malgun Gothic" pitchFamily="34" charset="-120"/>
+              </a:rPr>
+              <a:t>현재</a:t>
+            </a:r>
+            <a:endParaRPr lang="en-US" sz="1350" dirty="0"/>
+          </a:p>
+          <a:p>
+            <a:pPr algn="ctr" indent="0" marL="0">
+              <a:lnSpc>
+                <a:spcPct val="108000"/>
+              </a:lnSpc>
+              <a:buNone/>
+            </a:pPr>
+            <a:r>
               <a:rPr lang="en-US" sz="1150" dirty="0">
                 <a:solidFill>
                   <a:srgbClr val="5A7184"/>
@@ -1824,42 +1921,22 @@
                 <a:ea typeface="Malgun Gothic" pitchFamily="34" charset="-122"/>
                 <a:cs typeface="Malgun Gothic" pitchFamily="34" charset="-120"/>
               </a:rPr>
-              <a:t>Pod 1호 · 모델 v0.1</a:t>
-            </a:r>
-            <a:endParaRPr lang="en-US" sz="1150" dirty="0"/>
-          </a:p>
-        </p:txBody>
-      </p:sp>
-      <p:sp>
-        <p:nvSpPr>
-          <p:cNvPr id="30" name="Shape 25"/>
-          <p:cNvSpPr/>
-          <p:nvPr/>
-        </p:nvSpPr>
-        <p:spPr>
-          <a:xfrm>
-            <a:off x="6007608" y="4882896"/>
-            <a:ext cx="182880" cy="182880"/>
-          </a:xfrm>
-          <a:prstGeom prst="ellipse">
-            <a:avLst/>
-          </a:prstGeom>
-          <a:solidFill>
-            <a:srgbClr val="17313B"/>
-          </a:solidFill>
-          <a:ln/>
-        </p:spPr>
-      </p:sp>
-      <p:sp>
-        <p:nvSpPr>
-          <p:cNvPr id="31" name="Text 26"/>
-          <p:cNvSpPr/>
-          <p:nvPr/>
-        </p:nvSpPr>
-        <p:spPr>
-          <a:xfrm>
-            <a:off x="4818888" y="4572000"/>
-            <a:ext cx="2560320" cy="274320"/>
+              <a:t>성과급 ~6억 · 상한 철폐 · 영입 가능 수준</a:t>
+            </a:r>
+            <a:endParaRPr lang="en-US" sz="1350" dirty="0"/>
+          </a:p>
+        </p:txBody>
+      </p:sp>
+      <p:sp>
+        <p:nvSpPr>
+          <p:cNvPr id="30" name="Text 25"/>
+          <p:cNvSpPr/>
+          <p:nvPr/>
+        </p:nvSpPr>
+        <p:spPr>
+          <a:xfrm>
+            <a:off x="7516368" y="5157216"/>
+            <a:ext cx="274320" cy="804672"/>
           </a:xfrm>
           <a:prstGeom prst="rect">
             <a:avLst/>
@@ -1875,42 +1952,73 @@
               <a:buNone/>
             </a:pPr>
             <a:r>
-              <a:rPr lang="en-US" sz="1550" b="1" dirty="0">
-                <a:solidFill>
-                  <a:srgbClr val="17313B"/>
-                </a:solidFill>
-                <a:latin typeface="Malgun Gothic" pitchFamily="34" charset="0"/>
-                <a:ea typeface="Malgun Gothic" pitchFamily="34" charset="-122"/>
-                <a:cs typeface="Malgun Gothic" pitchFamily="34" charset="-120"/>
-              </a:rPr>
-              <a:t>1년 제도화</a:t>
-            </a:r>
-            <a:endParaRPr lang="en-US" sz="1550" dirty="0"/>
-          </a:p>
-        </p:txBody>
-      </p:sp>
-      <p:sp>
-        <p:nvSpPr>
-          <p:cNvPr id="32" name="Text 27"/>
-          <p:cNvSpPr/>
-          <p:nvPr/>
-        </p:nvSpPr>
-        <p:spPr>
-          <a:xfrm>
-            <a:off x="4727448" y="5138928"/>
-            <a:ext cx="2743200" cy="237744"/>
-          </a:xfrm>
-          <a:prstGeom prst="rect">
-            <a:avLst/>
-          </a:prstGeom>
-          <a:noFill/>
-          <a:ln/>
+              <a:rPr lang="en-US" sz="1400" dirty="0">
+                <a:solidFill>
+                  <a:srgbClr val="5A7184"/>
+                </a:solidFill>
+                <a:latin typeface="Malgun Gothic" pitchFamily="34" charset="0"/>
+                <a:ea typeface="Malgun Gothic" pitchFamily="34" charset="-122"/>
+                <a:cs typeface="Malgun Gothic" pitchFamily="34" charset="-120"/>
+              </a:rPr>
+              <a:t>▶</a:t>
+            </a:r>
+            <a:endParaRPr lang="en-US" sz="1400" dirty="0"/>
+          </a:p>
+        </p:txBody>
+      </p:sp>
+      <p:sp>
+        <p:nvSpPr>
+          <p:cNvPr id="31" name="Text 26"/>
+          <p:cNvSpPr/>
+          <p:nvPr/>
+        </p:nvSpPr>
+        <p:spPr>
+          <a:xfrm>
+            <a:off x="7790688" y="5157216"/>
+            <a:ext cx="3657600" cy="804672"/>
+          </a:xfrm>
+          <a:prstGeom prst="roundRect">
+            <a:avLst>
+              <a:gd name="adj" fmla="val 9091"/>
+            </a:avLst>
+          </a:prstGeom>
+          <a:solidFill>
+            <a:srgbClr val="E8F6F0"/>
+          </a:solidFill>
+          <a:ln w="19050">
+            <a:solidFill>
+              <a:srgbClr val="02A878"/>
+            </a:solidFill>
+          </a:ln>
         </p:spPr>
         <p:txBody>
           <a:bodyPr wrap="square" lIns="0" tIns="0" rIns="0" bIns="0" rtlCol="0" anchor="ctr"/>
           <a:lstStyle/>
           <a:p>
             <a:pPr algn="ctr" indent="0" marL="0">
+              <a:lnSpc>
+                <a:spcPct val="108000"/>
+              </a:lnSpc>
+              <a:buNone/>
+            </a:pPr>
+            <a:r>
+              <a:rPr lang="en-US" sz="1350" b="1" dirty="0">
+                <a:solidFill>
+                  <a:srgbClr val="17313B"/>
+                </a:solidFill>
+                <a:latin typeface="Malgun Gothic" pitchFamily="34" charset="0"/>
+                <a:ea typeface="Malgun Gothic" pitchFamily="34" charset="-122"/>
+                <a:cs typeface="Malgun Gothic" pitchFamily="34" charset="-120"/>
+              </a:rPr>
+              <a:t>선순환 기대</a:t>
+            </a:r>
+            <a:endParaRPr lang="en-US" sz="1350" dirty="0"/>
+          </a:p>
+          <a:p>
+            <a:pPr algn="ctr" indent="0" marL="0">
+              <a:lnSpc>
+                <a:spcPct val="108000"/>
+              </a:lnSpc>
               <a:buNone/>
             </a:pPr>
             <a:r>
@@ -1922,160 +2030,9 @@
                 <a:ea typeface="Malgun Gothic" pitchFamily="34" charset="-122"/>
                 <a:cs typeface="Malgun Gothic" pitchFamily="34" charset="-120"/>
               </a:rPr>
-              <a:t>Pod 3~5 · 전략적 고객 계약 1건</a:t>
-            </a:r>
-            <a:endParaRPr lang="en-US" sz="1150" dirty="0"/>
-          </a:p>
-        </p:txBody>
-      </p:sp>
-      <p:sp>
-        <p:nvSpPr>
-          <p:cNvPr id="33" name="Shape 28"/>
-          <p:cNvSpPr/>
-          <p:nvPr/>
-        </p:nvSpPr>
-        <p:spPr>
-          <a:xfrm>
-            <a:off x="9628632" y="4882896"/>
-            <a:ext cx="182880" cy="182880"/>
-          </a:xfrm>
-          <a:prstGeom prst="ellipse">
-            <a:avLst/>
-          </a:prstGeom>
-          <a:solidFill>
-            <a:srgbClr val="17313B"/>
-          </a:solidFill>
-          <a:ln/>
-        </p:spPr>
-      </p:sp>
-      <p:sp>
-        <p:nvSpPr>
-          <p:cNvPr id="34" name="Text 29"/>
-          <p:cNvSpPr/>
-          <p:nvPr/>
-        </p:nvSpPr>
-        <p:spPr>
-          <a:xfrm>
-            <a:off x="8439912" y="4572000"/>
-            <a:ext cx="2560320" cy="274320"/>
-          </a:xfrm>
-          <a:prstGeom prst="rect">
-            <a:avLst/>
-          </a:prstGeom>
-          <a:noFill/>
-          <a:ln/>
-        </p:spPr>
-        <p:txBody>
-          <a:bodyPr wrap="square" lIns="0" tIns="0" rIns="0" bIns="0" rtlCol="0" anchor="ctr"/>
-          <a:lstStyle/>
-          <a:p>
-            <a:pPr algn="ctr" indent="0" marL="0">
-              <a:buNone/>
-            </a:pPr>
-            <a:r>
-              <a:rPr lang="en-US" sz="1550" b="1" dirty="0">
-                <a:solidFill>
-                  <a:srgbClr val="17313B"/>
-                </a:solidFill>
-                <a:latin typeface="Malgun Gothic" pitchFamily="34" charset="0"/>
-                <a:ea typeface="Malgun Gothic" pitchFamily="34" charset="-122"/>
-                <a:cs typeface="Malgun Gothic" pitchFamily="34" charset="-120"/>
-              </a:rPr>
-              <a:t>3년 표준화</a:t>
-            </a:r>
-            <a:endParaRPr lang="en-US" sz="1550" dirty="0"/>
-          </a:p>
-        </p:txBody>
-      </p:sp>
-      <p:sp>
-        <p:nvSpPr>
-          <p:cNvPr id="35" name="Text 30"/>
-          <p:cNvSpPr/>
-          <p:nvPr/>
-        </p:nvSpPr>
-        <p:spPr>
-          <a:xfrm>
-            <a:off x="8348472" y="5138928"/>
-            <a:ext cx="2743200" cy="237744"/>
-          </a:xfrm>
-          <a:prstGeom prst="rect">
-            <a:avLst/>
-          </a:prstGeom>
-          <a:noFill/>
-          <a:ln/>
-        </p:spPr>
-        <p:txBody>
-          <a:bodyPr wrap="square" lIns="0" tIns="0" rIns="0" bIns="0" rtlCol="0" anchor="ctr"/>
-          <a:lstStyle/>
-          <a:p>
-            <a:pPr algn="ctr" indent="0" marL="0">
-              <a:buNone/>
-            </a:pPr>
-            <a:r>
-              <a:rPr lang="en-US" sz="1150" dirty="0">
-                <a:solidFill>
-                  <a:srgbClr val="5A7184"/>
-                </a:solidFill>
-                <a:latin typeface="Malgun Gothic" pitchFamily="34" charset="0"/>
-                <a:ea typeface="Malgun Gothic" pitchFamily="34" charset="-122"/>
-                <a:cs typeface="Malgun Gothic" pitchFamily="34" charset="-120"/>
-              </a:rPr>
-              <a:t>플랫폼 · 커스텀 30%+</a:t>
-            </a:r>
-            <a:endParaRPr lang="en-US" sz="1150" dirty="0"/>
-          </a:p>
-        </p:txBody>
-      </p:sp>
-      <p:sp>
-        <p:nvSpPr>
-          <p:cNvPr id="36" name="Text 31"/>
-          <p:cNvSpPr/>
-          <p:nvPr/>
-        </p:nvSpPr>
-        <p:spPr>
-          <a:xfrm>
-            <a:off x="457200" y="5596128"/>
-            <a:ext cx="11274552" cy="548640"/>
-          </a:xfrm>
-          <a:prstGeom prst="rect">
-            <a:avLst/>
-          </a:prstGeom>
-          <a:noFill/>
-          <a:ln/>
-        </p:spPr>
-        <p:txBody>
-          <a:bodyPr wrap="square" lIns="0" tIns="0" rIns="0" bIns="0" rtlCol="0" anchor="ctr"/>
-          <a:lstStyle/>
-          <a:p>
-            <a:pPr algn="ctr" indent="0" marL="0">
-              <a:buNone/>
-            </a:pPr>
-            <a:r>
-              <a:rPr lang="en-US" sz="3200" b="1" dirty="0">
-                <a:solidFill>
-                  <a:srgbClr val="028090"/>
-                </a:solidFill>
-                <a:latin typeface="Malgun Gothic" pitchFamily="34" charset="0"/>
-                <a:ea typeface="Malgun Gothic" pitchFamily="34" charset="-122"/>
-                <a:cs typeface="Malgun Gothic" pitchFamily="34" charset="-120"/>
-              </a:rPr>
-              <a:t>$100B</a:t>
-            </a:r>
-            <a:pPr algn="ctr" indent="0" marL="0">
-              <a:buNone/>
-            </a:pPr>
-            <a:r>
-              <a:rPr lang="en-US" sz="1400" dirty="0">
-                <a:solidFill>
-                  <a:srgbClr val="5A7184"/>
-                </a:solidFill>
-                <a:latin typeface="Malgun Gothic" pitchFamily="34" charset="0"/>
-                <a:ea typeface="Malgun Gothic" pitchFamily="34" charset="-122"/>
-                <a:cs typeface="Malgun Gothic" pitchFamily="34" charset="-120"/>
-              </a:rPr>
-              <a:t>   전략적 고객 계약 최소 계약매출 — 공동설계 없이는 참여할 수 없는 시장 (Micron IR, 2026-06)</a:t>
-            </a:r>
-            <a:endParaRPr lang="en-US" sz="3200" dirty="0"/>
+              <a:t>스타 영입 축적 → 조직 전반 수준 상향</a:t>
+            </a:r>
+            <a:endParaRPr lang="en-US" sz="1350" dirty="0"/>
           </a:p>
         </p:txBody>
       </p:sp>

--- a/dashboard/public/downloads/dev-transformation-summary-low.pptx
+++ b/dashboard/public/downloads/dev-transformation-summary-low.pptx
@@ -877,7 +877,7 @@
         <p:spPr>
           <a:xfrm>
             <a:off x="457200" y="237744"/>
-            <a:ext cx="9692640" cy="566928"/>
+            <a:ext cx="9994392" cy="566928"/>
           </a:xfrm>
           <a:prstGeom prst="rect">
             <a:avLst/>
